--- a/dist/초4/영어/소리낱말문장/초4_영어_소리낱말문장_02_세글자낱말읽고쓰기.pptx
+++ b/dist/초4/영어/소리낱말문장/초4_영어_소리낱말문장_02_세글자낱말읽고쓰기.pptx
@@ -120,20 +120,20 @@
   <p:extLst>
     <p:ext uri="{521415D9-36F7-43E2-AB2F-B90AF26B5E84}">
       <p14:sectionLst xmlns:p14="http://schemas.microsoft.com/office/powerpoint/2010/main">
-        <p14:section name="도입" id="{819d9687-4cfc-0a77-219d-1afd4ecb7dd9}">
+        <p14:section name="도입" id="{073486a3-d40e-e027-1b5e-d3b2f0fda755}">
           <p14:sldIdLst>
             <p14:sldId id="256"/>
             <p14:sldId id="257"/>
           </p14:sldIdLst>
         </p14:section>
-        <p14:section name="개념" id="{69678ff0-02a0-778d-3fc0-11ebd89eb9b7}">
+        <p14:section name="개념" id="{9c54902a-ad5c-14e2-f331-452a6107fabe}">
           <p14:sldIdLst>
             <p14:sldId id="258"/>
             <p14:sldId id="259"/>
             <p14:sldId id="263"/>
           </p14:sldIdLst>
         </p14:section>
-        <p14:section name="연습" id="{7a765c3e-0691-94a3-0809-f78926dc0277}">
+        <p14:section name="연습" id="{12214c14-99bd-cebe-c009-74f73b827b18}">
           <p14:sldIdLst>
             <p14:sldId id="260"/>
             <p14:sldId id="261"/>
@@ -141,25 +141,25 @@
             <p14:sldId id="264"/>
           </p14:sldIdLst>
         </p14:section>
-        <p14:section name="개념" id="{a458bf69-0ccf-906b-72dd-595608b04dac}">
+        <p14:section name="개념" id="{f1068e92-7fa0-9954-1008-86967ef8606e}">
           <p14:sldIdLst/>
         </p14:section>
-        <p14:section name="연습" id="{3a6e6a07-c08d-e689-b508-5e821d3972a5}">
+        <p14:section name="연습" id="{7d7d319b-59db-5d83-7afd-eef3b2cff57f}">
           <p14:sldIdLst/>
         </p14:section>
-        <p14:section name="확인" id="{6c6e0813-3dc4-6635-d59c-8b61d101f7a1}">
+        <p14:section name="확인" id="{0981508f-f397-390a-98a8-a14f37a20a05}">
           <p14:sldIdLst>
             <p14:sldId id="265"/>
             <p14:sldId id="266"/>
             <p14:sldId id="267"/>
           </p14:sldIdLst>
         </p14:section>
-        <p14:section name="정리" id="{806a8fb1-f54c-47d7-930f-00e6368154d7}">
+        <p14:section name="정리" id="{6b17a877-8f82-2277-bd40-ebc49faa4cd0}">
           <p14:sldIdLst>
             <p14:sldId id="268"/>
           </p14:sldIdLst>
         </p14:section>
-        <p14:section name="보충" id="{a037fffa-38d7-cff3-f81d-960d910b929b}">
+        <p14:section name="보충" id="{cc14699f-cfa5-13f1-6e0b-16913c6fc05c}">
           <p14:sldIdLst>
             <p14:sldId id="269"/>
           </p14:sldIdLst>

--- a/dist/초4/영어/소리낱말문장/초4_영어_소리낱말문장_02_세글자낱말읽고쓰기.pptx
+++ b/dist/초4/영어/소리낱말문장/초4_영어_소리낱말문장_02_세글자낱말읽고쓰기.pptx
@@ -120,20 +120,20 @@
   <p:extLst>
     <p:ext uri="{521415D9-36F7-43E2-AB2F-B90AF26B5E84}">
       <p14:sectionLst xmlns:p14="http://schemas.microsoft.com/office/powerpoint/2010/main">
-        <p14:section name="도입" id="{073486a3-d40e-e027-1b5e-d3b2f0fda755}">
+        <p14:section name="도입" id="{0d5f8eed-5bb7-c202-e714-f97e3adea109}">
           <p14:sldIdLst>
             <p14:sldId id="256"/>
             <p14:sldId id="257"/>
           </p14:sldIdLst>
         </p14:section>
-        <p14:section name="개념" id="{9c54902a-ad5c-14e2-f331-452a6107fabe}">
+        <p14:section name="개념" id="{d5cfaf93-168f-1bf8-eb48-6cb2f41fe709}">
           <p14:sldIdLst>
             <p14:sldId id="258"/>
             <p14:sldId id="259"/>
             <p14:sldId id="263"/>
           </p14:sldIdLst>
         </p14:section>
-        <p14:section name="연습" id="{12214c14-99bd-cebe-c009-74f73b827b18}">
+        <p14:section name="연습" id="{5802fad8-9820-65de-1fac-3bef1b33767f}">
           <p14:sldIdLst>
             <p14:sldId id="260"/>
             <p14:sldId id="261"/>
@@ -141,25 +141,25 @@
             <p14:sldId id="264"/>
           </p14:sldIdLst>
         </p14:section>
-        <p14:section name="개념" id="{f1068e92-7fa0-9954-1008-86967ef8606e}">
+        <p14:section name="개념" id="{b9d3898f-3072-845f-8bc4-d6d7e560c514}">
           <p14:sldIdLst/>
         </p14:section>
-        <p14:section name="연습" id="{7d7d319b-59db-5d83-7afd-eef3b2cff57f}">
+        <p14:section name="연습" id="{fea2e31d-577d-51c7-2360-7e4ea38c80b8}">
           <p14:sldIdLst/>
         </p14:section>
-        <p14:section name="확인" id="{0981508f-f397-390a-98a8-a14f37a20a05}">
+        <p14:section name="확인" id="{93c22277-3c19-99b6-2b8b-c322d2cad75e}">
           <p14:sldIdLst>
             <p14:sldId id="265"/>
             <p14:sldId id="266"/>
             <p14:sldId id="267"/>
           </p14:sldIdLst>
         </p14:section>
-        <p14:section name="정리" id="{6b17a877-8f82-2277-bd40-ebc49faa4cd0}">
+        <p14:section name="정리" id="{b5b01493-e06a-5177-be51-12b6a3fc0b33}">
           <p14:sldIdLst>
             <p14:sldId id="268"/>
           </p14:sldIdLst>
         </p14:section>
-        <p14:section name="보충" id="{cc14699f-cfa5-13f1-6e0b-16913c6fc05c}">
+        <p14:section name="보충" id="{07871610-d70b-3661-c2e9-452e527fa451}">
           <p14:sldIdLst>
             <p14:sldId id="269"/>
           </p14:sldIdLst>

--- a/dist/초4/영어/소리낱말문장/초4_영어_소리낱말문장_02_세글자낱말읽고쓰기.pptx
+++ b/dist/초4/영어/소리낱말문장/초4_영어_소리낱말문장_02_세글자낱말읽고쓰기.pptx
@@ -120,20 +120,20 @@
   <p:extLst>
     <p:ext uri="{521415D9-36F7-43E2-AB2F-B90AF26B5E84}">
       <p14:sectionLst xmlns:p14="http://schemas.microsoft.com/office/powerpoint/2010/main">
-        <p14:section name="도입" id="{0d5f8eed-5bb7-c202-e714-f97e3adea109}">
+        <p14:section name="도입" id="{47ade7aa-204d-9448-8187-f8b2b7b7e1d5}">
           <p14:sldIdLst>
             <p14:sldId id="256"/>
             <p14:sldId id="257"/>
           </p14:sldIdLst>
         </p14:section>
-        <p14:section name="개념" id="{d5cfaf93-168f-1bf8-eb48-6cb2f41fe709}">
+        <p14:section name="개념" id="{2ced6098-e424-7c6e-a68d-750ad8f912f7}">
           <p14:sldIdLst>
             <p14:sldId id="258"/>
             <p14:sldId id="259"/>
             <p14:sldId id="263"/>
           </p14:sldIdLst>
         </p14:section>
-        <p14:section name="연습" id="{5802fad8-9820-65de-1fac-3bef1b33767f}">
+        <p14:section name="연습" id="{5e535b4b-58b6-a097-a0ae-77fdaebb023c}">
           <p14:sldIdLst>
             <p14:sldId id="260"/>
             <p14:sldId id="261"/>
@@ -141,25 +141,25 @@
             <p14:sldId id="264"/>
           </p14:sldIdLst>
         </p14:section>
-        <p14:section name="개념" id="{b9d3898f-3072-845f-8bc4-d6d7e560c514}">
+        <p14:section name="개념" id="{ac67f807-f8d6-e512-be62-7855d56f3a79}">
           <p14:sldIdLst/>
         </p14:section>
-        <p14:section name="연습" id="{fea2e31d-577d-51c7-2360-7e4ea38c80b8}">
+        <p14:section name="연습" id="{1c50402a-66fc-9e3d-6165-16dfdf63a7ee}">
           <p14:sldIdLst/>
         </p14:section>
-        <p14:section name="확인" id="{93c22277-3c19-99b6-2b8b-c322d2cad75e}">
+        <p14:section name="확인" id="{0746f1c8-86df-a369-95c6-8dde68cf5f1a}">
           <p14:sldIdLst>
             <p14:sldId id="265"/>
             <p14:sldId id="266"/>
             <p14:sldId id="267"/>
           </p14:sldIdLst>
         </p14:section>
-        <p14:section name="정리" id="{b5b01493-e06a-5177-be51-12b6a3fc0b33}">
+        <p14:section name="정리" id="{4e97506f-052b-fcd2-25b6-ef2358f4f5ed}">
           <p14:sldIdLst>
             <p14:sldId id="268"/>
           </p14:sldIdLst>
         </p14:section>
-        <p14:section name="보충" id="{07871610-d70b-3661-c2e9-452e527fa451}">
+        <p14:section name="보충" id="{57675da0-079e-8df6-d238-3609997bafc6}">
           <p14:sldIdLst>
             <p14:sldId id="269"/>
           </p14:sldIdLst>
